--- a/中越詩歌/耶穌給你平安_Chúa Giê-su ban bình an cho bạn.pptx
+++ b/中越詩歌/耶穌給你平安_Chúa Giê-su ban bình an cho bạn.pptx
@@ -159,7 +159,7 @@
           <a:lstStyle/>
           <a:p>
             <a:r>
-              <a:rPr lang="en-US" altLang="zh-TW" smtClean="0"/>
+              <a:rPr lang="en-US" altLang="zh-TW"/>
               <a:t>Click to edit Master title style</a:t>
             </a:r>
             <a:endParaRPr lang="zh-TW" altLang="en-US"/>
@@ -278,7 +278,7 @@
           </a:lstStyle>
           <a:p>
             <a:r>
-              <a:rPr lang="en-US" altLang="zh-TW" smtClean="0"/>
+              <a:rPr lang="en-US" altLang="zh-TW"/>
               <a:t>Click to edit Master subtitle style</a:t>
             </a:r>
             <a:endParaRPr lang="zh-TW" altLang="en-US"/>
@@ -302,7 +302,7 @@
           <a:p>
             <a:fld id="{E4466B48-9B75-48A3-96B2-C5D953E96ADF}" type="datetimeFigureOut">
               <a:rPr lang="vi-VN" smtClean="0"/>
-              <a:t>04/08/2022</a:t>
+              <a:t>03/08/2024</a:t>
             </a:fld>
             <a:endParaRPr lang="vi-VN"/>
           </a:p>
@@ -396,7 +396,7 @@
           <a:lstStyle/>
           <a:p>
             <a:r>
-              <a:rPr lang="en-US" altLang="zh-TW" smtClean="0"/>
+              <a:rPr lang="en-US" altLang="zh-TW"/>
               <a:t>Click to edit Master title style</a:t>
             </a:r>
             <a:endParaRPr lang="zh-TW" altLang="en-US"/>
@@ -420,35 +420,35 @@
           <a:p>
             <a:pPr lvl="0"/>
             <a:r>
-              <a:rPr lang="en-US" altLang="zh-TW" smtClean="0"/>
+              <a:rPr lang="en-US" altLang="zh-TW"/>
               <a:t>Edit Master text styles</a:t>
             </a:r>
           </a:p>
           <a:p>
             <a:pPr lvl="1"/>
             <a:r>
-              <a:rPr lang="en-US" altLang="zh-TW" smtClean="0"/>
+              <a:rPr lang="en-US" altLang="zh-TW"/>
               <a:t>Second level</a:t>
             </a:r>
           </a:p>
           <a:p>
             <a:pPr lvl="2"/>
             <a:r>
-              <a:rPr lang="en-US" altLang="zh-TW" smtClean="0"/>
+              <a:rPr lang="en-US" altLang="zh-TW"/>
               <a:t>Third level</a:t>
             </a:r>
           </a:p>
           <a:p>
             <a:pPr lvl="3"/>
             <a:r>
-              <a:rPr lang="en-US" altLang="zh-TW" smtClean="0"/>
+              <a:rPr lang="en-US" altLang="zh-TW"/>
               <a:t>Fourth level</a:t>
             </a:r>
           </a:p>
           <a:p>
             <a:pPr lvl="4"/>
             <a:r>
-              <a:rPr lang="en-US" altLang="zh-TW" smtClean="0"/>
+              <a:rPr lang="en-US" altLang="zh-TW"/>
               <a:t>Fifth level</a:t>
             </a:r>
             <a:endParaRPr lang="zh-TW" altLang="en-US"/>
@@ -472,7 +472,7 @@
           <a:p>
             <a:fld id="{E4466B48-9B75-48A3-96B2-C5D953E96ADF}" type="datetimeFigureOut">
               <a:rPr lang="vi-VN" smtClean="0"/>
-              <a:t>04/08/2022</a:t>
+              <a:t>03/08/2024</a:t>
             </a:fld>
             <a:endParaRPr lang="vi-VN"/>
           </a:p>
@@ -571,7 +571,7 @@
           <a:lstStyle/>
           <a:p>
             <a:r>
-              <a:rPr lang="en-US" altLang="zh-TW" smtClean="0"/>
+              <a:rPr lang="en-US" altLang="zh-TW"/>
               <a:t>Click to edit Master title style</a:t>
             </a:r>
             <a:endParaRPr lang="zh-TW" altLang="en-US"/>
@@ -600,35 +600,35 @@
           <a:p>
             <a:pPr lvl="0"/>
             <a:r>
-              <a:rPr lang="en-US" altLang="zh-TW" smtClean="0"/>
+              <a:rPr lang="en-US" altLang="zh-TW"/>
               <a:t>Edit Master text styles</a:t>
             </a:r>
           </a:p>
           <a:p>
             <a:pPr lvl="1"/>
             <a:r>
-              <a:rPr lang="en-US" altLang="zh-TW" smtClean="0"/>
+              <a:rPr lang="en-US" altLang="zh-TW"/>
               <a:t>Second level</a:t>
             </a:r>
           </a:p>
           <a:p>
             <a:pPr lvl="2"/>
             <a:r>
-              <a:rPr lang="en-US" altLang="zh-TW" smtClean="0"/>
+              <a:rPr lang="en-US" altLang="zh-TW"/>
               <a:t>Third level</a:t>
             </a:r>
           </a:p>
           <a:p>
             <a:pPr lvl="3"/>
             <a:r>
-              <a:rPr lang="en-US" altLang="zh-TW" smtClean="0"/>
+              <a:rPr lang="en-US" altLang="zh-TW"/>
               <a:t>Fourth level</a:t>
             </a:r>
           </a:p>
           <a:p>
             <a:pPr lvl="4"/>
             <a:r>
-              <a:rPr lang="en-US" altLang="zh-TW" smtClean="0"/>
+              <a:rPr lang="en-US" altLang="zh-TW"/>
               <a:t>Fifth level</a:t>
             </a:r>
             <a:endParaRPr lang="zh-TW" altLang="en-US"/>
@@ -652,7 +652,7 @@
           <a:p>
             <a:fld id="{E4466B48-9B75-48A3-96B2-C5D953E96ADF}" type="datetimeFigureOut">
               <a:rPr lang="vi-VN" smtClean="0"/>
-              <a:t>04/08/2022</a:t>
+              <a:t>03/08/2024</a:t>
             </a:fld>
             <a:endParaRPr lang="vi-VN"/>
           </a:p>
@@ -746,7 +746,7 @@
           <a:lstStyle/>
           <a:p>
             <a:r>
-              <a:rPr lang="en-US" altLang="zh-TW" smtClean="0"/>
+              <a:rPr lang="en-US" altLang="zh-TW"/>
               <a:t>Click to edit Master title style</a:t>
             </a:r>
             <a:endParaRPr lang="zh-TW" altLang="en-US"/>
@@ -770,35 +770,35 @@
           <a:p>
             <a:pPr lvl="0"/>
             <a:r>
-              <a:rPr lang="en-US" altLang="zh-TW" smtClean="0"/>
+              <a:rPr lang="en-US" altLang="zh-TW"/>
               <a:t>Edit Master text styles</a:t>
             </a:r>
           </a:p>
           <a:p>
             <a:pPr lvl="1"/>
             <a:r>
-              <a:rPr lang="en-US" altLang="zh-TW" smtClean="0"/>
+              <a:rPr lang="en-US" altLang="zh-TW"/>
               <a:t>Second level</a:t>
             </a:r>
           </a:p>
           <a:p>
             <a:pPr lvl="2"/>
             <a:r>
-              <a:rPr lang="en-US" altLang="zh-TW" smtClean="0"/>
+              <a:rPr lang="en-US" altLang="zh-TW"/>
               <a:t>Third level</a:t>
             </a:r>
           </a:p>
           <a:p>
             <a:pPr lvl="3"/>
             <a:r>
-              <a:rPr lang="en-US" altLang="zh-TW" smtClean="0"/>
+              <a:rPr lang="en-US" altLang="zh-TW"/>
               <a:t>Fourth level</a:t>
             </a:r>
           </a:p>
           <a:p>
             <a:pPr lvl="4"/>
             <a:r>
-              <a:rPr lang="en-US" altLang="zh-TW" smtClean="0"/>
+              <a:rPr lang="en-US" altLang="zh-TW"/>
               <a:t>Fifth level</a:t>
             </a:r>
             <a:endParaRPr lang="zh-TW" altLang="en-US"/>
@@ -822,7 +822,7 @@
           <a:p>
             <a:fld id="{E4466B48-9B75-48A3-96B2-C5D953E96ADF}" type="datetimeFigureOut">
               <a:rPr lang="vi-VN" smtClean="0"/>
-              <a:t>04/08/2022</a:t>
+              <a:t>03/08/2024</a:t>
             </a:fld>
             <a:endParaRPr lang="vi-VN"/>
           </a:p>
@@ -925,7 +925,7 @@
           </a:lstStyle>
           <a:p>
             <a:r>
-              <a:rPr lang="en-US" altLang="zh-TW" smtClean="0"/>
+              <a:rPr lang="en-US" altLang="zh-TW"/>
               <a:t>Click to edit Master title style</a:t>
             </a:r>
             <a:endParaRPr lang="zh-TW" altLang="en-US"/>
@@ -1045,7 +1045,7 @@
           <a:p>
             <a:pPr lvl="0"/>
             <a:r>
-              <a:rPr lang="en-US" altLang="zh-TW" smtClean="0"/>
+              <a:rPr lang="en-US" altLang="zh-TW"/>
               <a:t>Edit Master text styles</a:t>
             </a:r>
           </a:p>
@@ -1068,7 +1068,7 @@
           <a:p>
             <a:fld id="{E4466B48-9B75-48A3-96B2-C5D953E96ADF}" type="datetimeFigureOut">
               <a:rPr lang="vi-VN" smtClean="0"/>
-              <a:t>04/08/2022</a:t>
+              <a:t>03/08/2024</a:t>
             </a:fld>
             <a:endParaRPr lang="vi-VN"/>
           </a:p>
@@ -1162,7 +1162,7 @@
           <a:lstStyle/>
           <a:p>
             <a:r>
-              <a:rPr lang="en-US" altLang="zh-TW" smtClean="0"/>
+              <a:rPr lang="en-US" altLang="zh-TW"/>
               <a:t>Click to edit Master title style</a:t>
             </a:r>
             <a:endParaRPr lang="zh-TW" altLang="en-US"/>
@@ -1219,35 +1219,35 @@
           <a:p>
             <a:pPr lvl="0"/>
             <a:r>
-              <a:rPr lang="en-US" altLang="zh-TW" smtClean="0"/>
+              <a:rPr lang="en-US" altLang="zh-TW"/>
               <a:t>Edit Master text styles</a:t>
             </a:r>
           </a:p>
           <a:p>
             <a:pPr lvl="1"/>
             <a:r>
-              <a:rPr lang="en-US" altLang="zh-TW" smtClean="0"/>
+              <a:rPr lang="en-US" altLang="zh-TW"/>
               <a:t>Second level</a:t>
             </a:r>
           </a:p>
           <a:p>
             <a:pPr lvl="2"/>
             <a:r>
-              <a:rPr lang="en-US" altLang="zh-TW" smtClean="0"/>
+              <a:rPr lang="en-US" altLang="zh-TW"/>
               <a:t>Third level</a:t>
             </a:r>
           </a:p>
           <a:p>
             <a:pPr lvl="3"/>
             <a:r>
-              <a:rPr lang="en-US" altLang="zh-TW" smtClean="0"/>
+              <a:rPr lang="en-US" altLang="zh-TW"/>
               <a:t>Fourth level</a:t>
             </a:r>
           </a:p>
           <a:p>
             <a:pPr lvl="4"/>
             <a:r>
-              <a:rPr lang="en-US" altLang="zh-TW" smtClean="0"/>
+              <a:rPr lang="en-US" altLang="zh-TW"/>
               <a:t>Fifth level</a:t>
             </a:r>
             <a:endParaRPr lang="zh-TW" altLang="en-US"/>
@@ -1304,35 +1304,35 @@
           <a:p>
             <a:pPr lvl="0"/>
             <a:r>
-              <a:rPr lang="en-US" altLang="zh-TW" smtClean="0"/>
+              <a:rPr lang="en-US" altLang="zh-TW"/>
               <a:t>Edit Master text styles</a:t>
             </a:r>
           </a:p>
           <a:p>
             <a:pPr lvl="1"/>
             <a:r>
-              <a:rPr lang="en-US" altLang="zh-TW" smtClean="0"/>
+              <a:rPr lang="en-US" altLang="zh-TW"/>
               <a:t>Second level</a:t>
             </a:r>
           </a:p>
           <a:p>
             <a:pPr lvl="2"/>
             <a:r>
-              <a:rPr lang="en-US" altLang="zh-TW" smtClean="0"/>
+              <a:rPr lang="en-US" altLang="zh-TW"/>
               <a:t>Third level</a:t>
             </a:r>
           </a:p>
           <a:p>
             <a:pPr lvl="3"/>
             <a:r>
-              <a:rPr lang="en-US" altLang="zh-TW" smtClean="0"/>
+              <a:rPr lang="en-US" altLang="zh-TW"/>
               <a:t>Fourth level</a:t>
             </a:r>
           </a:p>
           <a:p>
             <a:pPr lvl="4"/>
             <a:r>
-              <a:rPr lang="en-US" altLang="zh-TW" smtClean="0"/>
+              <a:rPr lang="en-US" altLang="zh-TW"/>
               <a:t>Fifth level</a:t>
             </a:r>
             <a:endParaRPr lang="zh-TW" altLang="en-US"/>
@@ -1356,7 +1356,7 @@
           <a:p>
             <a:fld id="{E4466B48-9B75-48A3-96B2-C5D953E96ADF}" type="datetimeFigureOut">
               <a:rPr lang="vi-VN" smtClean="0"/>
-              <a:t>04/08/2022</a:t>
+              <a:t>03/08/2024</a:t>
             </a:fld>
             <a:endParaRPr lang="vi-VN"/>
           </a:p>
@@ -1454,7 +1454,7 @@
           </a:lstStyle>
           <a:p>
             <a:r>
-              <a:rPr lang="en-US" altLang="zh-TW" smtClean="0"/>
+              <a:rPr lang="en-US" altLang="zh-TW"/>
               <a:t>Click to edit Master title style</a:t>
             </a:r>
             <a:endParaRPr lang="zh-TW" altLang="en-US"/>
@@ -1520,7 +1520,7 @@
           <a:p>
             <a:pPr lvl="0"/>
             <a:r>
-              <a:rPr lang="en-US" altLang="zh-TW" smtClean="0"/>
+              <a:rPr lang="en-US" altLang="zh-TW"/>
               <a:t>Edit Master text styles</a:t>
             </a:r>
           </a:p>
@@ -1576,35 +1576,35 @@
           <a:p>
             <a:pPr lvl="0"/>
             <a:r>
-              <a:rPr lang="en-US" altLang="zh-TW" smtClean="0"/>
+              <a:rPr lang="en-US" altLang="zh-TW"/>
               <a:t>Edit Master text styles</a:t>
             </a:r>
           </a:p>
           <a:p>
             <a:pPr lvl="1"/>
             <a:r>
-              <a:rPr lang="en-US" altLang="zh-TW" smtClean="0"/>
+              <a:rPr lang="en-US" altLang="zh-TW"/>
               <a:t>Second level</a:t>
             </a:r>
           </a:p>
           <a:p>
             <a:pPr lvl="2"/>
             <a:r>
-              <a:rPr lang="en-US" altLang="zh-TW" smtClean="0"/>
+              <a:rPr lang="en-US" altLang="zh-TW"/>
               <a:t>Third level</a:t>
             </a:r>
           </a:p>
           <a:p>
             <a:pPr lvl="3"/>
             <a:r>
-              <a:rPr lang="en-US" altLang="zh-TW" smtClean="0"/>
+              <a:rPr lang="en-US" altLang="zh-TW"/>
               <a:t>Fourth level</a:t>
             </a:r>
           </a:p>
           <a:p>
             <a:pPr lvl="4"/>
             <a:r>
-              <a:rPr lang="en-US" altLang="zh-TW" smtClean="0"/>
+              <a:rPr lang="en-US" altLang="zh-TW"/>
               <a:t>Fifth level</a:t>
             </a:r>
             <a:endParaRPr lang="zh-TW" altLang="en-US"/>
@@ -1670,7 +1670,7 @@
           <a:p>
             <a:pPr lvl="0"/>
             <a:r>
-              <a:rPr lang="en-US" altLang="zh-TW" smtClean="0"/>
+              <a:rPr lang="en-US" altLang="zh-TW"/>
               <a:t>Edit Master text styles</a:t>
             </a:r>
           </a:p>
@@ -1726,35 +1726,35 @@
           <a:p>
             <a:pPr lvl="0"/>
             <a:r>
-              <a:rPr lang="en-US" altLang="zh-TW" smtClean="0"/>
+              <a:rPr lang="en-US" altLang="zh-TW"/>
               <a:t>Edit Master text styles</a:t>
             </a:r>
           </a:p>
           <a:p>
             <a:pPr lvl="1"/>
             <a:r>
-              <a:rPr lang="en-US" altLang="zh-TW" smtClean="0"/>
+              <a:rPr lang="en-US" altLang="zh-TW"/>
               <a:t>Second level</a:t>
             </a:r>
           </a:p>
           <a:p>
             <a:pPr lvl="2"/>
             <a:r>
-              <a:rPr lang="en-US" altLang="zh-TW" smtClean="0"/>
+              <a:rPr lang="en-US" altLang="zh-TW"/>
               <a:t>Third level</a:t>
             </a:r>
           </a:p>
           <a:p>
             <a:pPr lvl="3"/>
             <a:r>
-              <a:rPr lang="en-US" altLang="zh-TW" smtClean="0"/>
+              <a:rPr lang="en-US" altLang="zh-TW"/>
               <a:t>Fourth level</a:t>
             </a:r>
           </a:p>
           <a:p>
             <a:pPr lvl="4"/>
             <a:r>
-              <a:rPr lang="en-US" altLang="zh-TW" smtClean="0"/>
+              <a:rPr lang="en-US" altLang="zh-TW"/>
               <a:t>Fifth level</a:t>
             </a:r>
             <a:endParaRPr lang="zh-TW" altLang="en-US"/>
@@ -1778,7 +1778,7 @@
           <a:p>
             <a:fld id="{E4466B48-9B75-48A3-96B2-C5D953E96ADF}" type="datetimeFigureOut">
               <a:rPr lang="vi-VN" smtClean="0"/>
-              <a:t>04/08/2022</a:t>
+              <a:t>03/08/2024</a:t>
             </a:fld>
             <a:endParaRPr lang="vi-VN"/>
           </a:p>
@@ -1872,7 +1872,7 @@
           <a:lstStyle/>
           <a:p>
             <a:r>
-              <a:rPr lang="en-US" altLang="zh-TW" smtClean="0"/>
+              <a:rPr lang="en-US" altLang="zh-TW"/>
               <a:t>Click to edit Master title style</a:t>
             </a:r>
             <a:endParaRPr lang="zh-TW" altLang="en-US"/>
@@ -1896,7 +1896,7 @@
           <a:p>
             <a:fld id="{E4466B48-9B75-48A3-96B2-C5D953E96ADF}" type="datetimeFigureOut">
               <a:rPr lang="vi-VN" smtClean="0"/>
-              <a:t>04/08/2022</a:t>
+              <a:t>03/08/2024</a:t>
             </a:fld>
             <a:endParaRPr lang="vi-VN"/>
           </a:p>
@@ -1991,7 +1991,7 @@
           <a:p>
             <a:fld id="{E4466B48-9B75-48A3-96B2-C5D953E96ADF}" type="datetimeFigureOut">
               <a:rPr lang="vi-VN" smtClean="0"/>
-              <a:t>04/08/2022</a:t>
+              <a:t>03/08/2024</a:t>
             </a:fld>
             <a:endParaRPr lang="vi-VN"/>
           </a:p>
@@ -2094,7 +2094,7 @@
           </a:lstStyle>
           <a:p>
             <a:r>
-              <a:rPr lang="en-US" altLang="zh-TW" smtClean="0"/>
+              <a:rPr lang="en-US" altLang="zh-TW"/>
               <a:t>Click to edit Master title style</a:t>
             </a:r>
             <a:endParaRPr lang="zh-TW" altLang="en-US"/>
@@ -2151,35 +2151,35 @@
           <a:p>
             <a:pPr lvl="0"/>
             <a:r>
-              <a:rPr lang="en-US" altLang="zh-TW" smtClean="0"/>
+              <a:rPr lang="en-US" altLang="zh-TW"/>
               <a:t>Edit Master text styles</a:t>
             </a:r>
           </a:p>
           <a:p>
             <a:pPr lvl="1"/>
             <a:r>
-              <a:rPr lang="en-US" altLang="zh-TW" smtClean="0"/>
+              <a:rPr lang="en-US" altLang="zh-TW"/>
               <a:t>Second level</a:t>
             </a:r>
           </a:p>
           <a:p>
             <a:pPr lvl="2"/>
             <a:r>
-              <a:rPr lang="en-US" altLang="zh-TW" smtClean="0"/>
+              <a:rPr lang="en-US" altLang="zh-TW"/>
               <a:t>Third level</a:t>
             </a:r>
           </a:p>
           <a:p>
             <a:pPr lvl="3"/>
             <a:r>
-              <a:rPr lang="en-US" altLang="zh-TW" smtClean="0"/>
+              <a:rPr lang="en-US" altLang="zh-TW"/>
               <a:t>Fourth level</a:t>
             </a:r>
           </a:p>
           <a:p>
             <a:pPr lvl="4"/>
             <a:r>
-              <a:rPr lang="en-US" altLang="zh-TW" smtClean="0"/>
+              <a:rPr lang="en-US" altLang="zh-TW"/>
               <a:t>Fifth level</a:t>
             </a:r>
             <a:endParaRPr lang="zh-TW" altLang="en-US"/>
@@ -2245,7 +2245,7 @@
           <a:p>
             <a:pPr lvl="0"/>
             <a:r>
-              <a:rPr lang="en-US" altLang="zh-TW" smtClean="0"/>
+              <a:rPr lang="en-US" altLang="zh-TW"/>
               <a:t>Edit Master text styles</a:t>
             </a:r>
           </a:p>
@@ -2268,7 +2268,7 @@
           <a:p>
             <a:fld id="{E4466B48-9B75-48A3-96B2-C5D953E96ADF}" type="datetimeFigureOut">
               <a:rPr lang="vi-VN" smtClean="0"/>
-              <a:t>04/08/2022</a:t>
+              <a:t>03/08/2024</a:t>
             </a:fld>
             <a:endParaRPr lang="vi-VN"/>
           </a:p>
@@ -2371,7 +2371,7 @@
           </a:lstStyle>
           <a:p>
             <a:r>
-              <a:rPr lang="en-US" altLang="zh-TW" smtClean="0"/>
+              <a:rPr lang="en-US" altLang="zh-TW"/>
               <a:t>Click to edit Master title style</a:t>
             </a:r>
             <a:endParaRPr lang="zh-TW" altLang="en-US"/>
@@ -2436,7 +2436,7 @@
           </a:lstStyle>
           <a:p>
             <a:r>
-              <a:rPr lang="en-US" altLang="zh-TW" smtClean="0"/>
+              <a:rPr lang="en-US" altLang="zh-TW"/>
               <a:t>Click icon to add picture</a:t>
             </a:r>
             <a:endParaRPr lang="zh-TW" altLang="en-US"/>
@@ -2502,7 +2502,7 @@
           <a:p>
             <a:pPr lvl="0"/>
             <a:r>
-              <a:rPr lang="en-US" altLang="zh-TW" smtClean="0"/>
+              <a:rPr lang="en-US" altLang="zh-TW"/>
               <a:t>Edit Master text styles</a:t>
             </a:r>
           </a:p>
@@ -2525,7 +2525,7 @@
           <a:p>
             <a:fld id="{E4466B48-9B75-48A3-96B2-C5D953E96ADF}" type="datetimeFigureOut">
               <a:rPr lang="vi-VN" smtClean="0"/>
-              <a:t>04/08/2022</a:t>
+              <a:t>03/08/2024</a:t>
             </a:fld>
             <a:endParaRPr lang="vi-VN"/>
           </a:p>
@@ -2639,10 +2639,9 @@
           <a:lstStyle/>
           <a:p>
             <a:r>
-              <a:rPr lang="zh-TW" altLang="en-US" smtClean="0"/>
+              <a:rPr lang="zh-TW" altLang="en-US"/>
               <a:t>按一下以編輯母片標題樣式</a:t>
             </a:r>
-            <a:endParaRPr lang="zh-TW" altLang="en-US"/>
           </a:p>
         </p:txBody>
       </p:sp>
@@ -2673,38 +2672,37 @@
           <a:p>
             <a:pPr lvl="0"/>
             <a:r>
-              <a:rPr lang="zh-TW" altLang="en-US" smtClean="0"/>
+              <a:rPr lang="zh-TW" altLang="en-US"/>
               <a:t>按一下以編輯母片文字樣式</a:t>
             </a:r>
           </a:p>
           <a:p>
             <a:pPr lvl="1"/>
             <a:r>
-              <a:rPr lang="zh-TW" altLang="en-US" smtClean="0"/>
+              <a:rPr lang="zh-TW" altLang="en-US"/>
               <a:t>第二層</a:t>
             </a:r>
           </a:p>
           <a:p>
             <a:pPr lvl="2"/>
             <a:r>
-              <a:rPr lang="zh-TW" altLang="en-US" smtClean="0"/>
+              <a:rPr lang="zh-TW" altLang="en-US"/>
               <a:t>第三層</a:t>
             </a:r>
           </a:p>
           <a:p>
             <a:pPr lvl="3"/>
             <a:r>
-              <a:rPr lang="zh-TW" altLang="en-US" smtClean="0"/>
+              <a:rPr lang="zh-TW" altLang="en-US"/>
               <a:t>第四層</a:t>
             </a:r>
           </a:p>
           <a:p>
             <a:pPr lvl="4"/>
             <a:r>
-              <a:rPr lang="zh-TW" altLang="en-US" smtClean="0"/>
+              <a:rPr lang="zh-TW" altLang="en-US"/>
               <a:t>第五層</a:t>
             </a:r>
-            <a:endParaRPr lang="zh-TW" altLang="en-US"/>
           </a:p>
         </p:txBody>
       </p:sp>
@@ -2743,7 +2741,7 @@
           <a:p>
             <a:fld id="{E4466B48-9B75-48A3-96B2-C5D953E96ADF}" type="datetimeFigureOut">
               <a:rPr lang="vi-VN" smtClean="0"/>
-              <a:t>04/08/2022</a:t>
+              <a:t>03/08/2024</a:t>
             </a:fld>
             <a:endParaRPr lang="vi-VN"/>
           </a:p>
@@ -3141,7 +3139,7 @@
           <a:lstStyle/>
           <a:p>
             <a:r>
-              <a:rPr lang="zh-TW" altLang="en-US" sz="7200" b="1" i="1" dirty="0" smtClean="0">
+              <a:rPr lang="zh-TW" altLang="en-US" sz="7200" b="1" i="1" dirty="0">
                 <a:solidFill>
                   <a:srgbClr val="660033"/>
                 </a:solidFill>
@@ -3155,24 +3153,7 @@
                 <a:latin typeface="微軟正黑體" pitchFamily="34" charset="-120"/>
                 <a:ea typeface="微軟正黑體" pitchFamily="34" charset="-120"/>
               </a:rPr>
-              <a:t>耶</a:t>
-            </a:r>
-            <a:r>
-              <a:rPr lang="zh-TW" altLang="en-US" sz="7200" b="1" i="1" dirty="0">
-                <a:solidFill>
-                  <a:srgbClr val="660033"/>
-                </a:solidFill>
-                <a:effectLst>
-                  <a:outerShdw blurRad="38100" dist="38100" dir="2700000" algn="tl">
-                    <a:srgbClr val="000000">
-                      <a:alpha val="43137"/>
-                    </a:srgbClr>
-                  </a:outerShdw>
-                </a:effectLst>
-                <a:latin typeface="微軟正黑體" pitchFamily="34" charset="-120"/>
-                <a:ea typeface="微軟正黑體" pitchFamily="34" charset="-120"/>
-              </a:rPr>
-              <a:t>穌給你平安</a:t>
+              <a:t>耶穌給你平安</a:t>
             </a:r>
           </a:p>
         </p:txBody>
@@ -3216,7 +3197,7 @@
           </a:lstStyle>
           <a:p>
             <a:r>
-              <a:rPr lang="en-US" sz="4800" b="1" i="1" dirty="0" err="1" smtClean="0">
+              <a:rPr lang="en-US" sz="4800" b="1" i="1" dirty="0" err="1">
                 <a:solidFill>
                   <a:srgbClr val="000066"/>
                 </a:solidFill>
@@ -3234,7 +3215,7 @@
               <a:t>Chúa</a:t>
             </a:r>
             <a:r>
-              <a:rPr lang="en-US" sz="4800" b="1" i="1" dirty="0" smtClean="0">
+              <a:rPr lang="en-US" sz="4800" b="1" i="1" dirty="0">
                 <a:solidFill>
                   <a:srgbClr val="000066"/>
                 </a:solidFill>
@@ -3451,24 +3432,14 @@
               <a:buNone/>
             </a:pPr>
             <a:r>
-              <a:rPr lang="zh-TW" altLang="en-US" sz="6400" b="1" dirty="0" smtClean="0">
+              <a:rPr lang="zh-TW" altLang="en-US" sz="6400" b="1" dirty="0">
                 <a:solidFill>
                   <a:srgbClr val="660033"/>
                 </a:solidFill>
                 <a:latin typeface="微軟正黑體" pitchFamily="34" charset="-120"/>
                 <a:ea typeface="微軟正黑體" pitchFamily="34" charset="-120"/>
               </a:rPr>
-              <a:t>哦   耶</a:t>
-            </a:r>
-            <a:r>
-              <a:rPr lang="zh-TW" altLang="en-US" sz="6400" b="1" dirty="0">
-                <a:solidFill>
-                  <a:srgbClr val="660033"/>
-                </a:solidFill>
-                <a:latin typeface="微軟正黑體" pitchFamily="34" charset="-120"/>
-                <a:ea typeface="微軟正黑體" pitchFamily="34" charset="-120"/>
-              </a:rPr>
-              <a:t>穌給你平安</a:t>
+              <a:t>哦   耶穌給你平安</a:t>
             </a:r>
             <a:endParaRPr lang="en-US" altLang="zh-CN" sz="6400" b="1" dirty="0">
               <a:solidFill>
@@ -3794,7 +3765,7 @@
         <p:spPr>
           <a:xfrm>
             <a:off x="0" y="5092916"/>
-            <a:ext cx="12192000" cy="646331"/>
+            <a:ext cx="12192000" cy="584775"/>
           </a:xfrm>
           <a:prstGeom prst="rect">
             <a:avLst/>
@@ -3809,55 +3780,39 @@
           <a:p>
             <a:pPr algn="ctr"/>
             <a:r>
-              <a:rPr lang="en-US" sz="3600" b="1" dirty="0">
+              <a:rPr lang="en-US" sz="3200" b="1" dirty="0">
                 <a:solidFill>
                   <a:srgbClr val="660033"/>
                 </a:solidFill>
-                <a:effectLst/>
                 <a:latin typeface="Microsoft JhengHei" panose="020B0604030504040204" pitchFamily="34" charset="-120"/>
                 <a:ea typeface="Microsoft JhengHei" panose="020B0604030504040204" pitchFamily="34" charset="-120"/>
               </a:rPr>
               <a:t>( </a:t>
             </a:r>
             <a:r>
-              <a:rPr lang="zh-CN" altLang="en-US" sz="3600" b="1" dirty="0" smtClean="0">
+              <a:rPr lang="zh-CN" altLang="en-US" sz="3200" b="1" dirty="0">
                 <a:solidFill>
                   <a:srgbClr val="660033"/>
                 </a:solidFill>
-                <a:effectLst/>
                 <a:latin typeface="Microsoft JhengHei" panose="020B0604030504040204" pitchFamily="34" charset="-120"/>
                 <a:ea typeface="Microsoft JhengHei" panose="020B0604030504040204" pitchFamily="34" charset="-120"/>
               </a:rPr>
-              <a:t>副</a:t>
-            </a:r>
-            <a:r>
-              <a:rPr lang="en-US" sz="3600" b="1" dirty="0" smtClean="0">
+              <a:t>副歌</a:t>
+            </a:r>
+            <a:r>
+              <a:rPr lang="en-US" sz="3200" b="1" dirty="0">
                 <a:solidFill>
                   <a:srgbClr val="660033"/>
                 </a:solidFill>
-                <a:effectLst/>
                 <a:latin typeface="Microsoft JhengHei" panose="020B0604030504040204" pitchFamily="34" charset="-120"/>
                 <a:ea typeface="Microsoft JhengHei" panose="020B0604030504040204" pitchFamily="34" charset="-120"/>
               </a:rPr>
-              <a:t> </a:t>
-            </a:r>
-            <a:r>
-              <a:rPr lang="en-US" sz="3600" b="1" dirty="0">
-                <a:solidFill>
-                  <a:srgbClr val="660033"/>
-                </a:solidFill>
-                <a:effectLst/>
-                <a:latin typeface="Microsoft JhengHei" panose="020B0604030504040204" pitchFamily="34" charset="-120"/>
-                <a:ea typeface="Microsoft JhengHei" panose="020B0604030504040204" pitchFamily="34" charset="-120"/>
-              </a:rPr>
-              <a:t>)</a:t>
-            </a:r>
-            <a:endParaRPr lang="vi-VN" sz="3600" b="1" dirty="0">
+              <a:t> )</a:t>
+            </a:r>
+            <a:endParaRPr lang="vi-VN" sz="3200" b="1" dirty="0">
               <a:solidFill>
                 <a:srgbClr val="660033"/>
               </a:solidFill>
-              <a:effectLst/>
-              <a:latin typeface="Microsoft JhengHei" panose="020B0604030504040204" pitchFamily="34" charset="-120"/>
               <a:ea typeface="Microsoft JhengHei" panose="020B0604030504040204" pitchFamily="34" charset="-120"/>
             </a:endParaRPr>
           </a:p>
@@ -3919,24 +3874,14 @@
               <a:buNone/>
             </a:pPr>
             <a:r>
-              <a:rPr lang="zh-TW" altLang="en-US" sz="6400" b="1" dirty="0" smtClean="0">
+              <a:rPr lang="zh-TW" altLang="en-US" sz="6400" b="1" dirty="0">
                 <a:solidFill>
                   <a:srgbClr val="660033"/>
                 </a:solidFill>
                 <a:latin typeface="微軟正黑體" pitchFamily="34" charset="-120"/>
                 <a:ea typeface="微軟正黑體" pitchFamily="34" charset="-120"/>
               </a:rPr>
-              <a:t>這</a:t>
-            </a:r>
-            <a:r>
-              <a:rPr lang="zh-TW" altLang="en-US" sz="6400" b="1" dirty="0">
-                <a:solidFill>
-                  <a:srgbClr val="660033"/>
-                </a:solidFill>
-                <a:latin typeface="微軟正黑體" pitchFamily="34" charset="-120"/>
-                <a:ea typeface="微軟正黑體" pitchFamily="34" charset="-120"/>
-              </a:rPr>
-              <a:t>世界雖有苦難</a:t>
+              <a:t>這世界雖有苦難</a:t>
             </a:r>
             <a:endParaRPr lang="en-US" altLang="zh-CN" sz="6400" b="1" dirty="0">
               <a:solidFill>
@@ -4111,7 +4056,7 @@
               <a:buNone/>
             </a:pPr>
             <a:r>
-              <a:rPr lang="en-US" sz="4000" b="1" dirty="0" err="1" smtClean="0">
+              <a:rPr lang="en-US" sz="4000" b="1" dirty="0" err="1">
                 <a:solidFill>
                   <a:srgbClr val="000066"/>
                 </a:solidFill>
@@ -4122,7 +4067,7 @@
               <a:t>Thế</a:t>
             </a:r>
             <a:r>
-              <a:rPr lang="en-US" sz="4000" b="1" dirty="0" smtClean="0">
+              <a:rPr lang="en-US" sz="4000" b="1" dirty="0">
                 <a:solidFill>
                   <a:srgbClr val="000066"/>
                 </a:solidFill>
@@ -4273,7 +4218,7 @@
         <p:spPr>
           <a:xfrm>
             <a:off x="0" y="5092916"/>
-            <a:ext cx="12192000" cy="646331"/>
+            <a:ext cx="12192000" cy="584775"/>
           </a:xfrm>
           <a:prstGeom prst="rect">
             <a:avLst/>
@@ -4288,7 +4233,7 @@
           <a:p>
             <a:pPr algn="ctr"/>
             <a:r>
-              <a:rPr lang="en-US" sz="3600" b="1" dirty="0">
+              <a:rPr lang="en-US" sz="3200" b="1" dirty="0">
                 <a:solidFill>
                   <a:srgbClr val="660033"/>
                 </a:solidFill>
@@ -4299,7 +4244,7 @@
               <a:t>( </a:t>
             </a:r>
             <a:r>
-              <a:rPr lang="zh-CN" altLang="en-US" sz="3600" b="1" dirty="0" smtClean="0">
+              <a:rPr lang="zh-CN" altLang="en-US" sz="3200" b="1" dirty="0">
                 <a:solidFill>
                   <a:srgbClr val="660033"/>
                 </a:solidFill>
@@ -4307,10 +4252,10 @@
                 <a:latin typeface="Microsoft JhengHei" panose="020B0604030504040204" pitchFamily="34" charset="-120"/>
                 <a:ea typeface="Microsoft JhengHei" panose="020B0604030504040204" pitchFamily="34" charset="-120"/>
               </a:rPr>
-              <a:t>正</a:t>
-            </a:r>
-            <a:r>
-              <a:rPr lang="en-US" sz="3600" b="1" dirty="0" smtClean="0">
+              <a:t>正歌</a:t>
+            </a:r>
+            <a:r>
+              <a:rPr lang="en-US" sz="3200" b="1" dirty="0">
                 <a:solidFill>
                   <a:srgbClr val="660033"/>
                 </a:solidFill>
@@ -4318,20 +4263,9 @@
                 <a:latin typeface="Microsoft JhengHei" panose="020B0604030504040204" pitchFamily="34" charset="-120"/>
                 <a:ea typeface="Microsoft JhengHei" panose="020B0604030504040204" pitchFamily="34" charset="-120"/>
               </a:rPr>
-              <a:t> </a:t>
-            </a:r>
-            <a:r>
-              <a:rPr lang="en-US" sz="3600" b="1" dirty="0">
-                <a:solidFill>
-                  <a:srgbClr val="660033"/>
-                </a:solidFill>
-                <a:effectLst/>
-                <a:latin typeface="Microsoft JhengHei" panose="020B0604030504040204" pitchFamily="34" charset="-120"/>
-                <a:ea typeface="Microsoft JhengHei" panose="020B0604030504040204" pitchFamily="34" charset="-120"/>
-              </a:rPr>
-              <a:t>)</a:t>
-            </a:r>
-            <a:endParaRPr lang="vi-VN" sz="3600" b="1" dirty="0">
+              <a:t> )</a:t>
+            </a:r>
+            <a:endParaRPr lang="vi-VN" sz="3200" b="1" dirty="0">
               <a:solidFill>
                 <a:srgbClr val="660033"/>
               </a:solidFill>
@@ -4742,7 +4676,7 @@
         <p:spPr>
           <a:xfrm>
             <a:off x="0" y="5092916"/>
-            <a:ext cx="12192000" cy="646331"/>
+            <a:ext cx="12192000" cy="584775"/>
           </a:xfrm>
           <a:prstGeom prst="rect">
             <a:avLst/>
@@ -4757,55 +4691,39 @@
           <a:p>
             <a:pPr algn="ctr"/>
             <a:r>
-              <a:rPr lang="en-US" sz="3600" b="1" dirty="0">
+              <a:rPr lang="en-US" sz="3200" b="1" dirty="0">
                 <a:solidFill>
                   <a:srgbClr val="660033"/>
                 </a:solidFill>
-                <a:effectLst/>
                 <a:latin typeface="Microsoft JhengHei" panose="020B0604030504040204" pitchFamily="34" charset="-120"/>
                 <a:ea typeface="Microsoft JhengHei" panose="020B0604030504040204" pitchFamily="34" charset="-120"/>
               </a:rPr>
               <a:t>( </a:t>
             </a:r>
             <a:r>
-              <a:rPr lang="zh-CN" altLang="en-US" sz="3600" b="1" dirty="0" smtClean="0">
+              <a:rPr lang="zh-CN" altLang="en-US" sz="3200" b="1" dirty="0">
                 <a:solidFill>
                   <a:srgbClr val="660033"/>
                 </a:solidFill>
-                <a:effectLst/>
                 <a:latin typeface="Microsoft JhengHei" panose="020B0604030504040204" pitchFamily="34" charset="-120"/>
                 <a:ea typeface="Microsoft JhengHei" panose="020B0604030504040204" pitchFamily="34" charset="-120"/>
               </a:rPr>
-              <a:t>正</a:t>
-            </a:r>
-            <a:r>
-              <a:rPr lang="en-US" sz="3600" b="1" dirty="0" smtClean="0">
+              <a:t>正歌</a:t>
+            </a:r>
+            <a:r>
+              <a:rPr lang="en-US" sz="3200" b="1" dirty="0">
                 <a:solidFill>
                   <a:srgbClr val="660033"/>
                 </a:solidFill>
-                <a:effectLst/>
                 <a:latin typeface="Microsoft JhengHei" panose="020B0604030504040204" pitchFamily="34" charset="-120"/>
                 <a:ea typeface="Microsoft JhengHei" panose="020B0604030504040204" pitchFamily="34" charset="-120"/>
               </a:rPr>
-              <a:t> </a:t>
-            </a:r>
-            <a:r>
-              <a:rPr lang="en-US" sz="3600" b="1" dirty="0">
-                <a:solidFill>
-                  <a:srgbClr val="660033"/>
-                </a:solidFill>
-                <a:effectLst/>
-                <a:latin typeface="Microsoft JhengHei" panose="020B0604030504040204" pitchFamily="34" charset="-120"/>
-                <a:ea typeface="Microsoft JhengHei" panose="020B0604030504040204" pitchFamily="34" charset="-120"/>
-              </a:rPr>
-              <a:t>)</a:t>
-            </a:r>
-            <a:endParaRPr lang="vi-VN" sz="3600" b="1" dirty="0">
+              <a:t> )</a:t>
+            </a:r>
+            <a:endParaRPr lang="vi-VN" sz="3200" b="1" dirty="0">
               <a:solidFill>
                 <a:srgbClr val="660033"/>
               </a:solidFill>
-              <a:effectLst/>
-              <a:latin typeface="Microsoft JhengHei" panose="020B0604030504040204" pitchFamily="34" charset="-120"/>
               <a:ea typeface="Microsoft JhengHei" panose="020B0604030504040204" pitchFamily="34" charset="-120"/>
             </a:endParaRPr>
           </a:p>
@@ -4874,27 +4792,7 @@
                 <a:latin typeface="微軟正黑體" pitchFamily="34" charset="-120"/>
                 <a:ea typeface="微軟正黑體" pitchFamily="34" charset="-120"/>
               </a:rPr>
-              <a:t>祂要給</a:t>
-            </a:r>
-            <a:r>
-              <a:rPr lang="zh-TW" altLang="en-US" sz="6400" b="1" dirty="0" smtClean="0">
-                <a:solidFill>
-                  <a:srgbClr val="660033"/>
-                </a:solidFill>
-                <a:latin typeface="微軟正黑體" pitchFamily="34" charset="-120"/>
-                <a:ea typeface="微軟正黑體" pitchFamily="34" charset="-120"/>
-              </a:rPr>
-              <a:t>你  祂</a:t>
-            </a:r>
-            <a:r>
-              <a:rPr lang="zh-TW" altLang="en-US" sz="6400" b="1" dirty="0">
-                <a:solidFill>
-                  <a:srgbClr val="660033"/>
-                </a:solidFill>
-                <a:latin typeface="微軟正黑體" pitchFamily="34" charset="-120"/>
-                <a:ea typeface="微軟正黑體" pitchFamily="34" charset="-120"/>
-              </a:rPr>
-              <a:t>要給你平安</a:t>
+              <a:t>祂要給你  祂要給你平安</a:t>
             </a:r>
             <a:endParaRPr lang="en-US" altLang="zh-CN" sz="6400" b="1" dirty="0">
               <a:solidFill>
@@ -5212,7 +5110,7 @@
         <p:spPr>
           <a:xfrm>
             <a:off x="0" y="5092916"/>
-            <a:ext cx="12192000" cy="646331"/>
+            <a:ext cx="12192000" cy="584775"/>
           </a:xfrm>
           <a:prstGeom prst="rect">
             <a:avLst/>
@@ -5227,55 +5125,39 @@
           <a:p>
             <a:pPr algn="ctr"/>
             <a:r>
-              <a:rPr lang="en-US" sz="3600" b="1" dirty="0">
+              <a:rPr lang="en-US" sz="3200" b="1" dirty="0">
                 <a:solidFill>
                   <a:srgbClr val="660033"/>
                 </a:solidFill>
-                <a:effectLst/>
                 <a:latin typeface="Microsoft JhengHei" panose="020B0604030504040204" pitchFamily="34" charset="-120"/>
                 <a:ea typeface="Microsoft JhengHei" panose="020B0604030504040204" pitchFamily="34" charset="-120"/>
               </a:rPr>
               <a:t>( </a:t>
             </a:r>
             <a:r>
-              <a:rPr lang="zh-CN" altLang="en-US" sz="3600" b="1" dirty="0" smtClean="0">
+              <a:rPr lang="zh-CN" altLang="en-US" sz="3200" b="1" dirty="0">
                 <a:solidFill>
                   <a:srgbClr val="660033"/>
                 </a:solidFill>
-                <a:effectLst/>
                 <a:latin typeface="Microsoft JhengHei" panose="020B0604030504040204" pitchFamily="34" charset="-120"/>
                 <a:ea typeface="Microsoft JhengHei" panose="020B0604030504040204" pitchFamily="34" charset="-120"/>
               </a:rPr>
-              <a:t>正</a:t>
-            </a:r>
-            <a:r>
-              <a:rPr lang="en-US" sz="3600" b="1" dirty="0" smtClean="0">
+              <a:t>正歌</a:t>
+            </a:r>
+            <a:r>
+              <a:rPr lang="en-US" sz="3200" b="1" dirty="0">
                 <a:solidFill>
                   <a:srgbClr val="660033"/>
                 </a:solidFill>
-                <a:effectLst/>
                 <a:latin typeface="Microsoft JhengHei" panose="020B0604030504040204" pitchFamily="34" charset="-120"/>
                 <a:ea typeface="Microsoft JhengHei" panose="020B0604030504040204" pitchFamily="34" charset="-120"/>
               </a:rPr>
-              <a:t> </a:t>
-            </a:r>
-            <a:r>
-              <a:rPr lang="en-US" sz="3600" b="1" dirty="0">
-                <a:solidFill>
-                  <a:srgbClr val="660033"/>
-                </a:solidFill>
-                <a:effectLst/>
-                <a:latin typeface="Microsoft JhengHei" panose="020B0604030504040204" pitchFamily="34" charset="-120"/>
-                <a:ea typeface="Microsoft JhengHei" panose="020B0604030504040204" pitchFamily="34" charset="-120"/>
-              </a:rPr>
-              <a:t>)</a:t>
-            </a:r>
-            <a:endParaRPr lang="vi-VN" sz="3600" b="1" dirty="0">
+              <a:t> )</a:t>
+            </a:r>
+            <a:endParaRPr lang="vi-VN" sz="3200" b="1" dirty="0">
               <a:solidFill>
                 <a:srgbClr val="660033"/>
               </a:solidFill>
-              <a:effectLst/>
-              <a:latin typeface="Microsoft JhengHei" panose="020B0604030504040204" pitchFamily="34" charset="-120"/>
               <a:ea typeface="Microsoft JhengHei" panose="020B0604030504040204" pitchFamily="34" charset="-120"/>
             </a:endParaRPr>
           </a:p>
@@ -5662,7 +5544,7 @@
         <p:spPr>
           <a:xfrm>
             <a:off x="0" y="5092916"/>
-            <a:ext cx="12192000" cy="646331"/>
+            <a:ext cx="12192000" cy="584775"/>
           </a:xfrm>
           <a:prstGeom prst="rect">
             <a:avLst/>
@@ -5677,55 +5559,39 @@
           <a:p>
             <a:pPr algn="ctr"/>
             <a:r>
-              <a:rPr lang="en-US" sz="3600" b="1" dirty="0">
+              <a:rPr lang="en-US" sz="3200" b="1" dirty="0">
                 <a:solidFill>
                   <a:srgbClr val="660033"/>
                 </a:solidFill>
-                <a:effectLst/>
                 <a:latin typeface="Microsoft JhengHei" panose="020B0604030504040204" pitchFamily="34" charset="-120"/>
                 <a:ea typeface="Microsoft JhengHei" panose="020B0604030504040204" pitchFamily="34" charset="-120"/>
               </a:rPr>
               <a:t>( </a:t>
             </a:r>
             <a:r>
-              <a:rPr lang="zh-CN" altLang="en-US" sz="3600" b="1" dirty="0" smtClean="0">
+              <a:rPr lang="zh-CN" altLang="en-US" sz="3200" b="1" dirty="0">
                 <a:solidFill>
                   <a:srgbClr val="660033"/>
                 </a:solidFill>
-                <a:effectLst/>
                 <a:latin typeface="Microsoft JhengHei" panose="020B0604030504040204" pitchFamily="34" charset="-120"/>
                 <a:ea typeface="Microsoft JhengHei" panose="020B0604030504040204" pitchFamily="34" charset="-120"/>
               </a:rPr>
-              <a:t>正</a:t>
-            </a:r>
-            <a:r>
-              <a:rPr lang="en-US" sz="3600" b="1" dirty="0" smtClean="0">
+              <a:t>正歌</a:t>
+            </a:r>
+            <a:r>
+              <a:rPr lang="en-US" sz="3200" b="1" dirty="0">
                 <a:solidFill>
                   <a:srgbClr val="660033"/>
                 </a:solidFill>
-                <a:effectLst/>
                 <a:latin typeface="Microsoft JhengHei" panose="020B0604030504040204" pitchFamily="34" charset="-120"/>
                 <a:ea typeface="Microsoft JhengHei" panose="020B0604030504040204" pitchFamily="34" charset="-120"/>
               </a:rPr>
-              <a:t> </a:t>
-            </a:r>
-            <a:r>
-              <a:rPr lang="en-US" sz="3600" b="1" dirty="0">
-                <a:solidFill>
-                  <a:srgbClr val="660033"/>
-                </a:solidFill>
-                <a:effectLst/>
-                <a:latin typeface="Microsoft JhengHei" panose="020B0604030504040204" pitchFamily="34" charset="-120"/>
-                <a:ea typeface="Microsoft JhengHei" panose="020B0604030504040204" pitchFamily="34" charset="-120"/>
-              </a:rPr>
-              <a:t>)</a:t>
-            </a:r>
-            <a:endParaRPr lang="vi-VN" sz="3600" b="1" dirty="0">
+              <a:t> )</a:t>
+            </a:r>
+            <a:endParaRPr lang="vi-VN" sz="3200" b="1" dirty="0">
               <a:solidFill>
                 <a:srgbClr val="660033"/>
               </a:solidFill>
-              <a:effectLst/>
-              <a:latin typeface="Microsoft JhengHei" panose="020B0604030504040204" pitchFamily="34" charset="-120"/>
               <a:ea typeface="Microsoft JhengHei" panose="020B0604030504040204" pitchFamily="34" charset="-120"/>
             </a:endParaRPr>
           </a:p>
@@ -5794,27 +5660,7 @@
                 <a:latin typeface="微軟正黑體" pitchFamily="34" charset="-120"/>
                 <a:ea typeface="微軟正黑體" pitchFamily="34" charset="-120"/>
               </a:rPr>
-              <a:t>耶</a:t>
-            </a:r>
-            <a:r>
-              <a:rPr lang="zh-TW" altLang="en-US" sz="6400" b="1" dirty="0" smtClean="0">
-                <a:solidFill>
-                  <a:srgbClr val="660033"/>
-                </a:solidFill>
-                <a:latin typeface="微軟正黑體" pitchFamily="34" charset="-120"/>
-                <a:ea typeface="微軟正黑體" pitchFamily="34" charset="-120"/>
-              </a:rPr>
-              <a:t>穌   耶</a:t>
-            </a:r>
-            <a:r>
-              <a:rPr lang="zh-TW" altLang="en-US" sz="6400" b="1" dirty="0">
-                <a:solidFill>
-                  <a:srgbClr val="660033"/>
-                </a:solidFill>
-                <a:latin typeface="微軟正黑體" pitchFamily="34" charset="-120"/>
-                <a:ea typeface="微軟正黑體" pitchFamily="34" charset="-120"/>
-              </a:rPr>
-              <a:t>穌給你平安</a:t>
+              <a:t>耶穌   耶穌給你平安</a:t>
             </a:r>
             <a:endParaRPr lang="en-US" altLang="zh-CN" sz="6400" b="1" dirty="0">
               <a:solidFill>
@@ -6154,7 +6000,7 @@
         <p:spPr>
           <a:xfrm>
             <a:off x="0" y="5092916"/>
-            <a:ext cx="12192000" cy="646331"/>
+            <a:ext cx="12192000" cy="584775"/>
           </a:xfrm>
           <a:prstGeom prst="rect">
             <a:avLst/>
@@ -6169,55 +6015,39 @@
           <a:p>
             <a:pPr algn="ctr"/>
             <a:r>
-              <a:rPr lang="en-US" sz="3600" b="1" dirty="0">
+              <a:rPr lang="en-US" sz="3200" b="1" dirty="0">
                 <a:solidFill>
                   <a:srgbClr val="660033"/>
                 </a:solidFill>
-                <a:effectLst/>
                 <a:latin typeface="Microsoft JhengHei" panose="020B0604030504040204" pitchFamily="34" charset="-120"/>
                 <a:ea typeface="Microsoft JhengHei" panose="020B0604030504040204" pitchFamily="34" charset="-120"/>
               </a:rPr>
               <a:t>( </a:t>
             </a:r>
             <a:r>
-              <a:rPr lang="zh-CN" altLang="en-US" sz="3600" b="1" dirty="0" smtClean="0">
+              <a:rPr lang="zh-CN" altLang="en-US" sz="3200" b="1" dirty="0">
                 <a:solidFill>
                   <a:srgbClr val="660033"/>
                 </a:solidFill>
-                <a:effectLst/>
                 <a:latin typeface="Microsoft JhengHei" panose="020B0604030504040204" pitchFamily="34" charset="-120"/>
                 <a:ea typeface="Microsoft JhengHei" panose="020B0604030504040204" pitchFamily="34" charset="-120"/>
               </a:rPr>
-              <a:t>副</a:t>
-            </a:r>
-            <a:r>
-              <a:rPr lang="en-US" sz="3600" b="1" dirty="0" smtClean="0">
+              <a:t>副歌</a:t>
+            </a:r>
+            <a:r>
+              <a:rPr lang="en-US" sz="3200" b="1" dirty="0">
                 <a:solidFill>
                   <a:srgbClr val="660033"/>
                 </a:solidFill>
-                <a:effectLst/>
                 <a:latin typeface="Microsoft JhengHei" panose="020B0604030504040204" pitchFamily="34" charset="-120"/>
                 <a:ea typeface="Microsoft JhengHei" panose="020B0604030504040204" pitchFamily="34" charset="-120"/>
               </a:rPr>
-              <a:t> </a:t>
-            </a:r>
-            <a:r>
-              <a:rPr lang="en-US" sz="3600" b="1" dirty="0">
-                <a:solidFill>
-                  <a:srgbClr val="660033"/>
-                </a:solidFill>
-                <a:effectLst/>
-                <a:latin typeface="Microsoft JhengHei" panose="020B0604030504040204" pitchFamily="34" charset="-120"/>
-                <a:ea typeface="Microsoft JhengHei" panose="020B0604030504040204" pitchFamily="34" charset="-120"/>
-              </a:rPr>
-              <a:t>)</a:t>
-            </a:r>
-            <a:endParaRPr lang="vi-VN" sz="3600" b="1" dirty="0">
+              <a:t> )</a:t>
+            </a:r>
+            <a:endParaRPr lang="vi-VN" sz="3200" b="1" dirty="0">
               <a:solidFill>
                 <a:srgbClr val="660033"/>
               </a:solidFill>
-              <a:effectLst/>
-              <a:latin typeface="Microsoft JhengHei" panose="020B0604030504040204" pitchFamily="34" charset="-120"/>
               <a:ea typeface="Microsoft JhengHei" panose="020B0604030504040204" pitchFamily="34" charset="-120"/>
             </a:endParaRPr>
           </a:p>
@@ -6645,7 +6475,7 @@
         <p:spPr>
           <a:xfrm>
             <a:off x="0" y="5092916"/>
-            <a:ext cx="12192000" cy="646331"/>
+            <a:ext cx="12192000" cy="584775"/>
           </a:xfrm>
           <a:prstGeom prst="rect">
             <a:avLst/>
@@ -6660,55 +6490,39 @@
           <a:p>
             <a:pPr algn="ctr"/>
             <a:r>
-              <a:rPr lang="en-US" sz="3600" b="1" dirty="0">
+              <a:rPr lang="en-US" sz="3200" b="1" dirty="0">
                 <a:solidFill>
                   <a:srgbClr val="660033"/>
                 </a:solidFill>
-                <a:effectLst/>
                 <a:latin typeface="Microsoft JhengHei" panose="020B0604030504040204" pitchFamily="34" charset="-120"/>
                 <a:ea typeface="Microsoft JhengHei" panose="020B0604030504040204" pitchFamily="34" charset="-120"/>
               </a:rPr>
               <a:t>( </a:t>
             </a:r>
             <a:r>
-              <a:rPr lang="zh-CN" altLang="en-US" sz="3600" b="1" dirty="0" smtClean="0">
+              <a:rPr lang="zh-CN" altLang="en-US" sz="3200" b="1" dirty="0">
                 <a:solidFill>
                   <a:srgbClr val="660033"/>
                 </a:solidFill>
-                <a:effectLst/>
                 <a:latin typeface="Microsoft JhengHei" panose="020B0604030504040204" pitchFamily="34" charset="-120"/>
                 <a:ea typeface="Microsoft JhengHei" panose="020B0604030504040204" pitchFamily="34" charset="-120"/>
               </a:rPr>
-              <a:t>副</a:t>
-            </a:r>
-            <a:r>
-              <a:rPr lang="en-US" sz="3600" b="1" dirty="0" smtClean="0">
+              <a:t>副歌</a:t>
+            </a:r>
+            <a:r>
+              <a:rPr lang="en-US" sz="3200" b="1" dirty="0">
                 <a:solidFill>
                   <a:srgbClr val="660033"/>
                 </a:solidFill>
-                <a:effectLst/>
                 <a:latin typeface="Microsoft JhengHei" panose="020B0604030504040204" pitchFamily="34" charset="-120"/>
                 <a:ea typeface="Microsoft JhengHei" panose="020B0604030504040204" pitchFamily="34" charset="-120"/>
               </a:rPr>
-              <a:t> </a:t>
-            </a:r>
-            <a:r>
-              <a:rPr lang="en-US" sz="3600" b="1" dirty="0">
-                <a:solidFill>
-                  <a:srgbClr val="660033"/>
-                </a:solidFill>
-                <a:effectLst/>
-                <a:latin typeface="Microsoft JhengHei" panose="020B0604030504040204" pitchFamily="34" charset="-120"/>
-                <a:ea typeface="Microsoft JhengHei" panose="020B0604030504040204" pitchFamily="34" charset="-120"/>
-              </a:rPr>
-              <a:t>)</a:t>
-            </a:r>
-            <a:endParaRPr lang="vi-VN" sz="3600" b="1" dirty="0">
+              <a:t> )</a:t>
+            </a:r>
+            <a:endParaRPr lang="vi-VN" sz="3200" b="1" dirty="0">
               <a:solidFill>
                 <a:srgbClr val="660033"/>
               </a:solidFill>
-              <a:effectLst/>
-              <a:latin typeface="Microsoft JhengHei" panose="020B0604030504040204" pitchFamily="34" charset="-120"/>
               <a:ea typeface="Microsoft JhengHei" panose="020B0604030504040204" pitchFamily="34" charset="-120"/>
             </a:endParaRPr>
           </a:p>
@@ -7051,7 +6865,7 @@
         <p:spPr>
           <a:xfrm>
             <a:off x="0" y="5092916"/>
-            <a:ext cx="12192000" cy="646331"/>
+            <a:ext cx="12192000" cy="584775"/>
           </a:xfrm>
           <a:prstGeom prst="rect">
             <a:avLst/>
@@ -7066,55 +6880,39 @@
           <a:p>
             <a:pPr algn="ctr"/>
             <a:r>
-              <a:rPr lang="en-US" sz="3600" b="1" dirty="0">
+              <a:rPr lang="en-US" sz="3200" b="1" dirty="0">
                 <a:solidFill>
                   <a:srgbClr val="660033"/>
                 </a:solidFill>
-                <a:effectLst/>
                 <a:latin typeface="Microsoft JhengHei" panose="020B0604030504040204" pitchFamily="34" charset="-120"/>
                 <a:ea typeface="Microsoft JhengHei" panose="020B0604030504040204" pitchFamily="34" charset="-120"/>
               </a:rPr>
               <a:t>( </a:t>
             </a:r>
             <a:r>
-              <a:rPr lang="zh-CN" altLang="en-US" sz="3600" b="1" dirty="0" smtClean="0">
+              <a:rPr lang="zh-CN" altLang="en-US" sz="3200" b="1" dirty="0">
                 <a:solidFill>
                   <a:srgbClr val="660033"/>
                 </a:solidFill>
-                <a:effectLst/>
                 <a:latin typeface="Microsoft JhengHei" panose="020B0604030504040204" pitchFamily="34" charset="-120"/>
                 <a:ea typeface="Microsoft JhengHei" panose="020B0604030504040204" pitchFamily="34" charset="-120"/>
               </a:rPr>
-              <a:t>副</a:t>
-            </a:r>
-            <a:r>
-              <a:rPr lang="en-US" sz="3600" b="1" dirty="0" smtClean="0">
+              <a:t>副歌</a:t>
+            </a:r>
+            <a:r>
+              <a:rPr lang="en-US" sz="3200" b="1" dirty="0">
                 <a:solidFill>
                   <a:srgbClr val="660033"/>
                 </a:solidFill>
-                <a:effectLst/>
                 <a:latin typeface="Microsoft JhengHei" panose="020B0604030504040204" pitchFamily="34" charset="-120"/>
                 <a:ea typeface="Microsoft JhengHei" panose="020B0604030504040204" pitchFamily="34" charset="-120"/>
               </a:rPr>
-              <a:t> </a:t>
-            </a:r>
-            <a:r>
-              <a:rPr lang="en-US" sz="3600" b="1" dirty="0">
-                <a:solidFill>
-                  <a:srgbClr val="660033"/>
-                </a:solidFill>
-                <a:effectLst/>
-                <a:latin typeface="Microsoft JhengHei" panose="020B0604030504040204" pitchFamily="34" charset="-120"/>
-                <a:ea typeface="Microsoft JhengHei" panose="020B0604030504040204" pitchFamily="34" charset="-120"/>
-              </a:rPr>
-              <a:t>)</a:t>
-            </a:r>
-            <a:endParaRPr lang="vi-VN" sz="3600" b="1" dirty="0">
+              <a:t> )</a:t>
+            </a:r>
+            <a:endParaRPr lang="vi-VN" sz="3200" b="1" dirty="0">
               <a:solidFill>
                 <a:srgbClr val="660033"/>
               </a:solidFill>
-              <a:effectLst/>
-              <a:latin typeface="Microsoft JhengHei" panose="020B0604030504040204" pitchFamily="34" charset="-120"/>
               <a:ea typeface="Microsoft JhengHei" panose="020B0604030504040204" pitchFamily="34" charset="-120"/>
             </a:endParaRPr>
           </a:p>
@@ -7545,7 +7343,7 @@
         <p:spPr>
           <a:xfrm>
             <a:off x="0" y="5092916"/>
-            <a:ext cx="12192000" cy="646331"/>
+            <a:ext cx="12192000" cy="584775"/>
           </a:xfrm>
           <a:prstGeom prst="rect">
             <a:avLst/>
@@ -7560,55 +7358,39 @@
           <a:p>
             <a:pPr algn="ctr"/>
             <a:r>
-              <a:rPr lang="en-US" sz="3600" b="1" dirty="0">
+              <a:rPr lang="en-US" sz="3200" b="1" dirty="0">
                 <a:solidFill>
                   <a:srgbClr val="660033"/>
                 </a:solidFill>
-                <a:effectLst/>
                 <a:latin typeface="Microsoft JhengHei" panose="020B0604030504040204" pitchFamily="34" charset="-120"/>
                 <a:ea typeface="Microsoft JhengHei" panose="020B0604030504040204" pitchFamily="34" charset="-120"/>
               </a:rPr>
               <a:t>( </a:t>
             </a:r>
             <a:r>
-              <a:rPr lang="zh-CN" altLang="en-US" sz="3600" b="1" dirty="0" smtClean="0">
+              <a:rPr lang="zh-CN" altLang="en-US" sz="3200" b="1" dirty="0">
                 <a:solidFill>
                   <a:srgbClr val="660033"/>
                 </a:solidFill>
-                <a:effectLst/>
                 <a:latin typeface="Microsoft JhengHei" panose="020B0604030504040204" pitchFamily="34" charset="-120"/>
                 <a:ea typeface="Microsoft JhengHei" panose="020B0604030504040204" pitchFamily="34" charset="-120"/>
               </a:rPr>
-              <a:t>副</a:t>
-            </a:r>
-            <a:r>
-              <a:rPr lang="en-US" sz="3600" b="1" dirty="0" smtClean="0">
+              <a:t>副歌</a:t>
+            </a:r>
+            <a:r>
+              <a:rPr lang="en-US" sz="3200" b="1" dirty="0">
                 <a:solidFill>
                   <a:srgbClr val="660033"/>
                 </a:solidFill>
-                <a:effectLst/>
                 <a:latin typeface="Microsoft JhengHei" panose="020B0604030504040204" pitchFamily="34" charset="-120"/>
                 <a:ea typeface="Microsoft JhengHei" panose="020B0604030504040204" pitchFamily="34" charset="-120"/>
               </a:rPr>
-              <a:t> </a:t>
-            </a:r>
-            <a:r>
-              <a:rPr lang="en-US" sz="3600" b="1" dirty="0">
-                <a:solidFill>
-                  <a:srgbClr val="660033"/>
-                </a:solidFill>
-                <a:effectLst/>
-                <a:latin typeface="Microsoft JhengHei" panose="020B0604030504040204" pitchFamily="34" charset="-120"/>
-                <a:ea typeface="Microsoft JhengHei" panose="020B0604030504040204" pitchFamily="34" charset="-120"/>
-              </a:rPr>
-              <a:t>)</a:t>
-            </a:r>
-            <a:endParaRPr lang="vi-VN" sz="3600" b="1" dirty="0">
+              <a:t> )</a:t>
+            </a:r>
+            <a:endParaRPr lang="vi-VN" sz="3200" b="1" dirty="0">
               <a:solidFill>
                 <a:srgbClr val="660033"/>
               </a:solidFill>
-              <a:effectLst/>
-              <a:latin typeface="Microsoft JhengHei" panose="020B0604030504040204" pitchFamily="34" charset="-120"/>
               <a:ea typeface="Microsoft JhengHei" panose="020B0604030504040204" pitchFamily="34" charset="-120"/>
             </a:endParaRPr>
           </a:p>
